--- a/dist/초3/수학/자연수계산/초3_수학_자연수계산_01_세자리수의덧셈_학생용.pptx
+++ b/dist/초3/수학/자연수계산/초3_수학_자연수계산_01_세자리수의덧셈_학생용.pptx
@@ -120,13 +120,13 @@
   <p:extLst>
     <p:ext uri="{521415D9-36F7-43E2-AB2F-B90AF26B5E84}">
       <p14:sectionLst xmlns:p14="http://schemas.microsoft.com/office/powerpoint/2010/main">
-        <p14:section name="도입" id="{21ddfdd1-c4c6-7693-90ce-feaa3a122561}">
+        <p14:section name="도입" id="{dda01703-f144-8d16-7e0f-492b094a4972}">
           <p14:sldIdLst>
             <p14:sldId id="256"/>
             <p14:sldId id="257"/>
           </p14:sldIdLst>
         </p14:section>
-        <p14:section name="개념" id="{8f43a6a4-1878-0fd4-db02-a7b5163bfbfe}">
+        <p14:section name="개념" id="{ae1a4f5b-a2d0-b560-58dd-9fe4d5b1458a}">
           <p14:sldIdLst>
             <p14:sldId id="258"/>
             <p14:sldId id="259"/>
@@ -135,31 +135,31 @@
             <p14:sldId id="264"/>
           </p14:sldIdLst>
         </p14:section>
-        <p14:section name="연습" id="{e014d5dc-5fa5-e5ac-3dcc-0b333c0a71ce}">
+        <p14:section name="연습" id="{12658982-a22a-e050-12f5-f9f4f1b7e3c6}">
           <p14:sldIdLst>
             <p14:sldId id="262"/>
             <p14:sldId id="263"/>
             <p14:sldId id="265"/>
           </p14:sldIdLst>
         </p14:section>
-        <p14:section name="개념" id="{d8a1bdaa-33a0-db63-7347-a49d3f0c836c}">
+        <p14:section name="개념" id="{ec2494dd-55d9-8043-449f-a050fa67e833}">
           <p14:sldIdLst/>
         </p14:section>
-        <p14:section name="연습" id="{c969daf8-25e6-351e-8547-a7782f79d0b4}">
+        <p14:section name="연습" id="{b8c7e9d2-1ad6-0a47-459f-97ec7083c977}">
           <p14:sldIdLst/>
         </p14:section>
-        <p14:section name="확인" id="{3c4b73ef-97cc-4a79-b43e-b5472c32de65}">
+        <p14:section name="확인" id="{f460e2f7-4154-b75d-6fe0-ebd1edd5ac07}">
           <p14:sldIdLst>
             <p14:sldId id="266"/>
             <p14:sldId id="267"/>
           </p14:sldIdLst>
         </p14:section>
-        <p14:section name="정리" id="{75aacccf-8eeb-0d25-a6f9-5d5948942419}">
+        <p14:section name="정리" id="{90a4edc8-58be-a085-2071-0ed50456eb32}">
           <p14:sldIdLst>
             <p14:sldId id="268"/>
           </p14:sldIdLst>
         </p14:section>
-        <p14:section name="보충" id="{a67be964-9f83-68b9-f80e-cb6963f8ebbf}">
+        <p14:section name="보충" id="{9ffc0f57-995b-dad3-88c3-9b16ddcdbb3d}">
           <p14:sldIdLst>
             <p14:sldId id="269"/>
           </p14:sldIdLst>
@@ -2865,7 +2865,7 @@
           </p:nvPr>
         </p:nvGraphicFramePr>
         <p:xfrm>
-          <a:off x="7726680" y="965200"/>
+          <a:off x="7726680" y="1000760"/>
           <a:ext cx="3840480" cy="914400"/>
         </p:xfrm>
         <a:graphic>
@@ -2878,7 +2878,7 @@
                 <a:gridCol w="960120"/>
                 <a:gridCol w="960120"/>
               </a:tblGrid>
-              <a:tr h="568960">
+              <a:tr h="551180">
                 <a:tc>
                   <a:txBody>
                     <a:bodyPr/>
@@ -3141,7 +3141,7 @@
                   </a:tcPr>
                 </a:tc>
               </a:tr>
-              <a:tr h="568960">
+              <a:tr h="551180">
                 <a:tc>
                   <a:txBody>
                     <a:bodyPr/>
@@ -3404,7 +3404,7 @@
                   </a:tcPr>
                 </a:tc>
               </a:tr>
-              <a:tr h="568960">
+              <a:tr h="551180">
                 <a:tc>
                   <a:txBody>
                     <a:bodyPr/>
@@ -3678,7 +3678,7 @@
                   </a:tcPr>
                 </a:tc>
               </a:tr>
-              <a:tr h="568960">
+              <a:tr h="551180">
                 <a:tc>
                   <a:txBody>
                     <a:bodyPr/>
@@ -6206,7 +6206,7 @@
           </p:nvPr>
         </p:nvGraphicFramePr>
         <p:xfrm>
-          <a:off x="8063728" y="2042160"/>
+          <a:off x="8063728" y="2089785"/>
           <a:ext cx="3291840" cy="914400"/>
         </p:xfrm>
         <a:graphic>
@@ -6218,7 +6218,7 @@
                 <a:gridCol w="1097280"/>
                 <a:gridCol w="1097280"/>
               </a:tblGrid>
-              <a:tr h="609600">
+              <a:tr h="590550">
                 <a:tc>
                   <a:txBody>
                     <a:bodyPr/>
@@ -6413,7 +6413,7 @@
                   </a:tcPr>
                 </a:tc>
               </a:tr>
-              <a:tr h="609600">
+              <a:tr h="590550">
                 <a:tc>
                   <a:txBody>
                     <a:bodyPr/>
@@ -6597,7 +6597,7 @@
                   </a:tcPr>
                 </a:tc>
               </a:tr>
-              <a:tr h="609600">
+              <a:tr h="590550">
                 <a:tc>
                   <a:txBody>
                     <a:bodyPr/>
@@ -6792,7 +6792,7 @@
                   </a:tcPr>
                 </a:tc>
               </a:tr>
-              <a:tr h="609600">
+              <a:tr h="590550">
                 <a:tc>
                   <a:txBody>
                     <a:bodyPr/>
@@ -6998,7 +6998,7 @@
                   </a:tcPr>
                 </a:tc>
               </a:tr>
-              <a:tr h="609600">
+              <a:tr h="590550">
                 <a:tc>
                   <a:txBody>
                     <a:bodyPr/>
@@ -8095,7 +8095,7 @@
           </p:nvPr>
         </p:nvGraphicFramePr>
         <p:xfrm>
-          <a:off x="2253996" y="2058670"/>
+          <a:off x="2253996" y="2099945"/>
           <a:ext cx="7680960" cy="914400"/>
         </p:xfrm>
         <a:graphic>
@@ -8108,7 +8108,7 @@
                 <a:gridCol w="1920240"/>
                 <a:gridCol w="1920240"/>
               </a:tblGrid>
-              <a:tr h="528320">
+              <a:tr h="511810">
                 <a:tc>
                   <a:txBody>
                     <a:bodyPr/>
@@ -8371,7 +8371,7 @@
                   </a:tcPr>
                 </a:tc>
               </a:tr>
-              <a:tr h="528320">
+              <a:tr h="511810">
                 <a:tc>
                   <a:txBody>
                     <a:bodyPr/>
@@ -8645,7 +8645,7 @@
                   </a:tcPr>
                 </a:tc>
               </a:tr>
-              <a:tr h="528320">
+              <a:tr h="511810">
                 <a:tc>
                   <a:txBody>
                     <a:bodyPr/>
@@ -8919,7 +8919,7 @@
                   </a:tcPr>
                 </a:tc>
               </a:tr>
-              <a:tr h="528320">
+              <a:tr h="511810">
                 <a:tc>
                   <a:txBody>
                     <a:bodyPr/>
@@ -9193,7 +9193,7 @@
                   </a:tcPr>
                 </a:tc>
               </a:tr>
-              <a:tr h="528320">
+              <a:tr h="511810">
                 <a:tc>
                   <a:txBody>
                     <a:bodyPr/>
@@ -9708,7 +9708,7 @@
           </p:nvPr>
         </p:nvGraphicFramePr>
         <p:xfrm>
-          <a:off x="7483450" y="2042160"/>
+          <a:off x="7483450" y="2089785"/>
           <a:ext cx="4023360" cy="914400"/>
         </p:xfrm>
         <a:graphic>
@@ -9721,7 +9721,7 @@
                 <a:gridCol w="1005840"/>
                 <a:gridCol w="1005840"/>
               </a:tblGrid>
-              <a:tr h="609600">
+              <a:tr h="590550">
                 <a:tc>
                   <a:txBody>
                     <a:bodyPr/>
@@ -9984,7 +9984,7 @@
                   </a:tcPr>
                 </a:tc>
               </a:tr>
-              <a:tr h="609600">
+              <a:tr h="590550">
                 <a:tc>
                   <a:txBody>
                     <a:bodyPr/>
@@ -10225,7 +10225,7 @@
                   </a:tcPr>
                 </a:tc>
               </a:tr>
-              <a:tr h="609600">
+              <a:tr h="590550">
                 <a:tc>
                   <a:txBody>
                     <a:bodyPr/>
@@ -10488,7 +10488,7 @@
                   </a:tcPr>
                 </a:tc>
               </a:tr>
-              <a:tr h="609600">
+              <a:tr h="590550">
                 <a:tc>
                   <a:txBody>
                     <a:bodyPr/>
@@ -10762,7 +10762,7 @@
                   </a:tcPr>
                 </a:tc>
               </a:tr>
-              <a:tr h="609600">
+              <a:tr h="590550">
                 <a:tc>
                   <a:txBody>
                     <a:bodyPr/>
@@ -11535,7 +11535,7 @@
           </p:nvPr>
         </p:nvGraphicFramePr>
         <p:xfrm>
-          <a:off x="7483450" y="2042160"/>
+          <a:off x="7483450" y="2089785"/>
           <a:ext cx="4023360" cy="914400"/>
         </p:xfrm>
         <a:graphic>
@@ -11548,7 +11548,7 @@
                 <a:gridCol w="1005840"/>
                 <a:gridCol w="1005840"/>
               </a:tblGrid>
-              <a:tr h="609600">
+              <a:tr h="590550">
                 <a:tc>
                   <a:txBody>
                     <a:bodyPr/>
@@ -11811,7 +11811,7 @@
                   </a:tcPr>
                 </a:tc>
               </a:tr>
-              <a:tr h="609600">
+              <a:tr h="590550">
                 <a:tc>
                   <a:txBody>
                     <a:bodyPr/>
@@ -12052,7 +12052,7 @@
                   </a:tcPr>
                 </a:tc>
               </a:tr>
-              <a:tr h="609600">
+              <a:tr h="590550">
                 <a:tc>
                   <a:txBody>
                     <a:bodyPr/>
@@ -12315,7 +12315,7 @@
                   </a:tcPr>
                 </a:tc>
               </a:tr>
-              <a:tr h="609600">
+              <a:tr h="590550">
                 <a:tc>
                   <a:txBody>
                     <a:bodyPr/>
@@ -12589,7 +12589,7 @@
                   </a:tcPr>
                 </a:tc>
               </a:tr>
-              <a:tr h="609600">
+              <a:tr h="590550">
                 <a:tc>
                   <a:txBody>
                     <a:bodyPr/>
@@ -13362,7 +13362,7 @@
           </p:nvPr>
         </p:nvGraphicFramePr>
         <p:xfrm>
-          <a:off x="7483450" y="2042160"/>
+          <a:off x="7483450" y="2089785"/>
           <a:ext cx="4023360" cy="914400"/>
         </p:xfrm>
         <a:graphic>
@@ -13375,7 +13375,7 @@
                 <a:gridCol w="1005840"/>
                 <a:gridCol w="1005840"/>
               </a:tblGrid>
-              <a:tr h="609600">
+              <a:tr h="590550">
                 <a:tc>
                   <a:txBody>
                     <a:bodyPr/>
@@ -13638,7 +13638,7 @@
                   </a:tcPr>
                 </a:tc>
               </a:tr>
-              <a:tr h="609600">
+              <a:tr h="590550">
                 <a:tc>
                   <a:txBody>
                     <a:bodyPr/>
@@ -13890,7 +13890,7 @@
                   </a:tcPr>
                 </a:tc>
               </a:tr>
-              <a:tr h="609600">
+              <a:tr h="590550">
                 <a:tc>
                   <a:txBody>
                     <a:bodyPr/>
@@ -14153,7 +14153,7 @@
                   </a:tcPr>
                 </a:tc>
               </a:tr>
-              <a:tr h="609600">
+              <a:tr h="590550">
                 <a:tc>
                   <a:txBody>
                     <a:bodyPr/>
@@ -14427,7 +14427,7 @@
                   </a:tcPr>
                 </a:tc>
               </a:tr>
-              <a:tr h="609600">
+              <a:tr h="590550">
                 <a:tc>
                   <a:txBody>
                     <a:bodyPr/>
@@ -15183,7 +15183,7 @@
           </p:nvPr>
         </p:nvGraphicFramePr>
         <p:xfrm>
-          <a:off x="6947154" y="2104644"/>
+          <a:off x="6947154" y="2044319"/>
           <a:ext cx="4023360" cy="914400"/>
         </p:xfrm>
         <a:graphic>
@@ -15196,7 +15196,7 @@
                 <a:gridCol w="1005840"/>
                 <a:gridCol w="1005840"/>
               </a:tblGrid>
-              <a:tr h="487680">
+              <a:tr h="511810">
                 <a:tc>
                   <a:txBody>
                     <a:bodyPr/>
@@ -15205,7 +15205,7 @@
                       <a:pPr eaLnBrk="0" algn="ctr" indent="0" marL="0">
                         <a:buNone/>
                       </a:pPr>
-                      <a:endParaRPr lang="en-US" sz="2400" dirty="0">
+                      <a:endParaRPr lang="en-US" sz="2600" dirty="0">
                         <a:latin typeface="맑은 고딕" charset="0"/>
                         <a:ea typeface="맑은 고딕" charset="0"/>
                         <a:cs typeface="맑은 고딕" charset="0"/>
@@ -15263,7 +15263,7 @@
                         <a:buNone/>
                       </a:pPr>
                       <a:r>
-                        <a:rPr lang="en-US" sz="2400" b="1" dirty="0">
+                        <a:rPr lang="en-US" sz="2600" b="1" dirty="0">
                           <a:solidFill>
                             <a:srgbClr val="1F2937"/>
                           </a:solidFill>
@@ -15273,7 +15273,7 @@
                         </a:rPr>
                         <a:t>백</a:t>
                       </a:r>
-                      <a:endParaRPr lang="en-US" sz="2400" dirty="0">
+                      <a:endParaRPr lang="en-US" sz="2600" dirty="0">
                         <a:latin typeface="맑은 고딕" charset="0"/>
                         <a:ea typeface="맑은 고딕" charset="0"/>
                         <a:cs typeface="맑은 고딕" charset="0"/>
@@ -15331,7 +15331,7 @@
                         <a:buNone/>
                       </a:pPr>
                       <a:r>
-                        <a:rPr lang="en-US" sz="2400" b="1" dirty="0">
+                        <a:rPr lang="en-US" sz="2600" b="1" dirty="0">
                           <a:solidFill>
                             <a:srgbClr val="1F2937"/>
                           </a:solidFill>
@@ -15341,7 +15341,7 @@
                         </a:rPr>
                         <a:t>십</a:t>
                       </a:r>
-                      <a:endParaRPr lang="en-US" sz="2400" dirty="0">
+                      <a:endParaRPr lang="en-US" sz="2600" dirty="0">
                         <a:latin typeface="맑은 고딕" charset="0"/>
                         <a:ea typeface="맑은 고딕" charset="0"/>
                         <a:cs typeface="맑은 고딕" charset="0"/>
@@ -15399,7 +15399,7 @@
                         <a:buNone/>
                       </a:pPr>
                       <a:r>
-                        <a:rPr lang="en-US" sz="2400" b="1" dirty="0">
+                        <a:rPr lang="en-US" sz="2600" b="1" dirty="0">
                           <a:solidFill>
                             <a:srgbClr val="1F2937"/>
                           </a:solidFill>
@@ -15409,7 +15409,7 @@
                         </a:rPr>
                         <a:t>일</a:t>
                       </a:r>
-                      <a:endParaRPr lang="en-US" sz="2400" dirty="0">
+                      <a:endParaRPr lang="en-US" sz="2600" dirty="0">
                         <a:latin typeface="맑은 고딕" charset="0"/>
                         <a:ea typeface="맑은 고딕" charset="0"/>
                         <a:cs typeface="맑은 고딕" charset="0"/>
@@ -15459,7 +15459,7 @@
                   </a:tcPr>
                 </a:tc>
               </a:tr>
-              <a:tr h="487680">
+              <a:tr h="511810">
                 <a:tc>
                   <a:txBody>
                     <a:bodyPr/>
@@ -15468,7 +15468,7 @@
                       <a:pPr eaLnBrk="0" algn="ctr" indent="0" marL="0">
                         <a:buNone/>
                       </a:pPr>
-                      <a:endParaRPr lang="en-US" sz="2400" dirty="0">
+                      <a:endParaRPr lang="en-US" sz="2600" dirty="0">
                         <a:latin typeface="맑은 고딕" charset="0"/>
                         <a:ea typeface="맑은 고딕" charset="0"/>
                         <a:cs typeface="맑은 고딕" charset="0"/>
@@ -15526,7 +15526,7 @@
                         <a:buNone/>
                       </a:pPr>
                       <a:r>
-                        <a:rPr lang="en-US" sz="2400" dirty="0">
+                        <a:rPr lang="en-US" sz="2600" dirty="0">
                           <a:solidFill>
                             <a:srgbClr val="1F2937"/>
                           </a:solidFill>
@@ -15536,7 +15536,7 @@
                         </a:rPr>
                         <a:t>□</a:t>
                       </a:r>
-                      <a:endParaRPr lang="en-US" sz="2400" dirty="0">
+                      <a:endParaRPr lang="en-US" sz="2600" dirty="0">
                         <a:latin typeface="맑은 고딕" charset="0"/>
                         <a:ea typeface="맑은 고딕" charset="0"/>
                         <a:cs typeface="맑은 고딕" charset="0"/>
@@ -15594,7 +15594,7 @@
                         <a:buNone/>
                       </a:pPr>
                       <a:r>
-                        <a:rPr lang="en-US" sz="2400" dirty="0">
+                        <a:rPr lang="en-US" sz="2600" dirty="0">
                           <a:solidFill>
                             <a:srgbClr val="1F2937"/>
                           </a:solidFill>
@@ -15604,7 +15604,7 @@
                         </a:rPr>
                         <a:t>□</a:t>
                       </a:r>
-                      <a:endParaRPr lang="en-US" sz="2400" dirty="0">
+                      <a:endParaRPr lang="en-US" sz="2600" dirty="0">
                         <a:latin typeface="맑은 고딕" charset="0"/>
                         <a:ea typeface="맑은 고딕" charset="0"/>
                         <a:cs typeface="맑은 고딕" charset="0"/>
@@ -15661,7 +15661,7 @@
                       <a:pPr eaLnBrk="0" algn="ctr" indent="0" marL="0">
                         <a:buNone/>
                       </a:pPr>
-                      <a:endParaRPr lang="en-US" sz="2400" dirty="0">
+                      <a:endParaRPr lang="en-US" sz="2600" dirty="0">
                         <a:latin typeface="맑은 고딕" charset="0"/>
                         <a:ea typeface="맑은 고딕" charset="0"/>
                         <a:cs typeface="맑은 고딕" charset="0"/>
@@ -15711,7 +15711,7 @@
                   </a:tcPr>
                 </a:tc>
               </a:tr>
-              <a:tr h="487680">
+              <a:tr h="511810">
                 <a:tc>
                   <a:txBody>
                     <a:bodyPr/>
@@ -15720,7 +15720,7 @@
                       <a:pPr eaLnBrk="0" algn="ctr" indent="0" marL="0">
                         <a:buNone/>
                       </a:pPr>
-                      <a:endParaRPr lang="en-US" sz="2400" dirty="0">
+                      <a:endParaRPr lang="en-US" sz="2600" dirty="0">
                         <a:latin typeface="맑은 고딕" charset="0"/>
                         <a:ea typeface="맑은 고딕" charset="0"/>
                         <a:cs typeface="맑은 고딕" charset="0"/>
@@ -15778,7 +15778,7 @@
                         <a:buNone/>
                       </a:pPr>
                       <a:r>
-                        <a:rPr lang="en-US" sz="2400" dirty="0">
+                        <a:rPr lang="en-US" sz="2600" dirty="0">
                           <a:solidFill>
                             <a:srgbClr val="1F2937"/>
                           </a:solidFill>
@@ -15788,7 +15788,7 @@
                         </a:rPr>
                         <a:t>4</a:t>
                       </a:r>
-                      <a:endParaRPr lang="en-US" sz="2400" dirty="0">
+                      <a:endParaRPr lang="en-US" sz="2600" dirty="0">
                         <a:latin typeface="맑은 고딕" charset="0"/>
                         <a:ea typeface="맑은 고딕" charset="0"/>
                         <a:cs typeface="맑은 고딕" charset="0"/>
@@ -15846,7 +15846,7 @@
                         <a:buNone/>
                       </a:pPr>
                       <a:r>
-                        <a:rPr lang="en-US" sz="2400" dirty="0">
+                        <a:rPr lang="en-US" sz="2600" dirty="0">
                           <a:solidFill>
                             <a:srgbClr val="1F2937"/>
                           </a:solidFill>
@@ -15856,7 +15856,7 @@
                         </a:rPr>
                         <a:t>5</a:t>
                       </a:r>
-                      <a:endParaRPr lang="en-US" sz="2400" dirty="0">
+                      <a:endParaRPr lang="en-US" sz="2600" dirty="0">
                         <a:latin typeface="맑은 고딕" charset="0"/>
                         <a:ea typeface="맑은 고딕" charset="0"/>
                         <a:cs typeface="맑은 고딕" charset="0"/>
@@ -15914,7 +15914,7 @@
                         <a:buNone/>
                       </a:pPr>
                       <a:r>
-                        <a:rPr lang="en-US" sz="2400" dirty="0">
+                        <a:rPr lang="en-US" sz="2600" dirty="0">
                           <a:solidFill>
                             <a:srgbClr val="1F2937"/>
                           </a:solidFill>
@@ -15924,7 +15924,7 @@
                         </a:rPr>
                         <a:t>7</a:t>
                       </a:r>
-                      <a:endParaRPr lang="en-US" sz="2400" dirty="0">
+                      <a:endParaRPr lang="en-US" sz="2600" dirty="0">
                         <a:latin typeface="맑은 고딕" charset="0"/>
                         <a:ea typeface="맑은 고딕" charset="0"/>
                         <a:cs typeface="맑은 고딕" charset="0"/>
@@ -15974,7 +15974,7 @@
                   </a:tcPr>
                 </a:tc>
               </a:tr>
-              <a:tr h="487680">
+              <a:tr h="511810">
                 <a:tc>
                   <a:txBody>
                     <a:bodyPr/>
@@ -15984,7 +15984,7 @@
                         <a:buNone/>
                       </a:pPr>
                       <a:r>
-                        <a:rPr lang="en-US" sz="2400" dirty="0">
+                        <a:rPr lang="en-US" sz="2600" dirty="0">
                           <a:solidFill>
                             <a:srgbClr val="1F2937"/>
                           </a:solidFill>
@@ -15994,7 +15994,7 @@
                         </a:rPr>
                         <a:t>+</a:t>
                       </a:r>
-                      <a:endParaRPr lang="en-US" sz="2400" dirty="0">
+                      <a:endParaRPr lang="en-US" sz="2600" dirty="0">
                         <a:latin typeface="맑은 고딕" charset="0"/>
                         <a:ea typeface="맑은 고딕" charset="0"/>
                         <a:cs typeface="맑은 고딕" charset="0"/>
@@ -16052,7 +16052,7 @@
                         <a:buNone/>
                       </a:pPr>
                       <a:r>
-                        <a:rPr lang="en-US" sz="2400" dirty="0">
+                        <a:rPr lang="en-US" sz="2600" dirty="0">
                           <a:solidFill>
                             <a:srgbClr val="1F2937"/>
                           </a:solidFill>
@@ -16062,7 +16062,7 @@
                         </a:rPr>
                         <a:t>3</a:t>
                       </a:r>
-                      <a:endParaRPr lang="en-US" sz="2400" dirty="0">
+                      <a:endParaRPr lang="en-US" sz="2600" dirty="0">
                         <a:latin typeface="맑은 고딕" charset="0"/>
                         <a:ea typeface="맑은 고딕" charset="0"/>
                         <a:cs typeface="맑은 고딕" charset="0"/>
@@ -16120,7 +16120,7 @@
                         <a:buNone/>
                       </a:pPr>
                       <a:r>
-                        <a:rPr lang="en-US" sz="2400" dirty="0">
+                        <a:rPr lang="en-US" sz="2600" dirty="0">
                           <a:solidFill>
                             <a:srgbClr val="1F2937"/>
                           </a:solidFill>
@@ -16130,7 +16130,7 @@
                         </a:rPr>
                         <a:t>6</a:t>
                       </a:r>
-                      <a:endParaRPr lang="en-US" sz="2400" dirty="0">
+                      <a:endParaRPr lang="en-US" sz="2600" dirty="0">
                         <a:latin typeface="맑은 고딕" charset="0"/>
                         <a:ea typeface="맑은 고딕" charset="0"/>
                         <a:cs typeface="맑은 고딕" charset="0"/>
@@ -16188,7 +16188,7 @@
                         <a:buNone/>
                       </a:pPr>
                       <a:r>
-                        <a:rPr lang="en-US" sz="2400" dirty="0">
+                        <a:rPr lang="en-US" sz="2600" dirty="0">
                           <a:solidFill>
                             <a:srgbClr val="1F2937"/>
                           </a:solidFill>
@@ -16198,7 +16198,7 @@
                         </a:rPr>
                         <a:t>8</a:t>
                       </a:r>
-                      <a:endParaRPr lang="en-US" sz="2400" dirty="0">
+                      <a:endParaRPr lang="en-US" sz="2600" dirty="0">
                         <a:latin typeface="맑은 고딕" charset="0"/>
                         <a:ea typeface="맑은 고딕" charset="0"/>
                         <a:cs typeface="맑은 고딕" charset="0"/>
@@ -16248,7 +16248,7 @@
                   </a:tcPr>
                 </a:tc>
               </a:tr>
-              <a:tr h="487680">
+              <a:tr h="511810">
                 <a:tc>
                   <a:txBody>
                     <a:bodyPr/>
@@ -16257,7 +16257,7 @@
                       <a:pPr eaLnBrk="0" algn="ctr" indent="0" marL="0">
                         <a:buNone/>
                       </a:pPr>
-                      <a:endParaRPr lang="en-US" sz="2400" dirty="0">
+                      <a:endParaRPr lang="en-US" sz="2600" dirty="0">
                         <a:latin typeface="맑은 고딕" charset="0"/>
                         <a:ea typeface="맑은 고딕" charset="0"/>
                         <a:cs typeface="맑은 고딕" charset="0"/>
@@ -16315,7 +16315,7 @@
                         <a:buNone/>
                       </a:pPr>
                       <a:r>
-                        <a:rPr lang="en-US" sz="2400" dirty="0">
+                        <a:rPr lang="en-US" sz="2600" dirty="0">
                           <a:solidFill>
                             <a:srgbClr val="1F2937"/>
                           </a:solidFill>
@@ -16325,7 +16325,7 @@
                         </a:rPr>
                         <a:t>□</a:t>
                       </a:r>
-                      <a:endParaRPr lang="en-US" sz="2400" dirty="0">
+                      <a:endParaRPr lang="en-US" sz="2600" dirty="0">
                         <a:latin typeface="맑은 고딕" charset="0"/>
                         <a:ea typeface="맑은 고딕" charset="0"/>
                         <a:cs typeface="맑은 고딕" charset="0"/>
@@ -16383,7 +16383,7 @@
                         <a:buNone/>
                       </a:pPr>
                       <a:r>
-                        <a:rPr lang="en-US" sz="2400" dirty="0">
+                        <a:rPr lang="en-US" sz="2600" dirty="0">
                           <a:solidFill>
                             <a:srgbClr val="1F2937"/>
                           </a:solidFill>
@@ -16393,7 +16393,7 @@
                         </a:rPr>
                         <a:t>□</a:t>
                       </a:r>
-                      <a:endParaRPr lang="en-US" sz="2400" dirty="0">
+                      <a:endParaRPr lang="en-US" sz="2600" dirty="0">
                         <a:latin typeface="맑은 고딕" charset="0"/>
                         <a:ea typeface="맑은 고딕" charset="0"/>
                         <a:cs typeface="맑은 고딕" charset="0"/>
@@ -16451,7 +16451,7 @@
                         <a:buNone/>
                       </a:pPr>
                       <a:r>
-                        <a:rPr lang="en-US" sz="2400" dirty="0">
+                        <a:rPr lang="en-US" sz="2600" dirty="0">
                           <a:solidFill>
                             <a:srgbClr val="1F2937"/>
                           </a:solidFill>
@@ -16461,7 +16461,7 @@
                         </a:rPr>
                         <a:t>□</a:t>
                       </a:r>
-                      <a:endParaRPr lang="en-US" sz="2400" dirty="0">
+                      <a:endParaRPr lang="en-US" sz="2600" dirty="0">
                         <a:latin typeface="맑은 고딕" charset="0"/>
                         <a:ea typeface="맑은 고딕" charset="0"/>
                         <a:cs typeface="맑은 고딕" charset="0"/>
